--- a/Poster_VRPTW_NCKHSV_2026.pptx
+++ b/Poster_VRPTW_NCKHSV_2026.pptx
@@ -3103,7 +3103,7 @@
             <a:avLst/>
           </a:prstGeom>
           <a:solidFill>
-            <a:srgbClr val="0C0820"/>
+            <a:srgbClr val="0A1128"/>
           </a:solidFill>
           <a:ln>
             <a:noFill/>
